--- a/slides/usecases/04_Nachfrageprognose.pptx
+++ b/slides/usecases/04_Nachfrageprognose.pptx
@@ -7780,7 +7780,7 @@
                   <a:srgbClr val="404040"/>
                 </a:solidFill>
               </a:rPr>
-              <a:t>Status: schattenpilot.</a:t>
+              <a:t>Status: probebetrieb.</a:t>
             </a:r>
           </a:p>
         </p:txBody>
@@ -7958,7 +7958,7 @@
                   <a:srgbClr val="404040"/>
                 </a:solidFill>
               </a:rPr>
-              <a:t>Ein Schattenpilot läuft mit und wird protokolliert, ohne dass jemand nach der Prognose handelt.</a:t>
+              <a:t>Ein Probebetrieb läuft mit und wird protokolliert, ohne dass jemand nach der Prognose handelt.</a:t>
             </a:r>
           </a:p>
         </p:txBody>
